--- a/20260313_勉強会.pptx
+++ b/20260313_勉強会.pptx
@@ -638,7 +638,7 @@
           <a:p>
             <a:fld id="{7CD3DBBB-9083-48F2-A813-7157E7295ADE}" type="datetimeFigureOut">
               <a:rPr kumimoji="1" lang="ja-JP" altLang="en-US" smtClean="0"/>
-              <a:t>2026/3/10</a:t>
+              <a:t>2026/3/12</a:t>
             </a:fld>
             <a:endParaRPr kumimoji="1" lang="ja-JP" altLang="en-US"/>
           </a:p>
@@ -1217,7 +1217,7 @@
             </a:r>
             <a:r>
               <a:rPr kumimoji="1" lang="ja-JP" altLang="en-US" dirty="0"/>
-              <a:t>分野で世界をリードする企業で、これまでの深層学習の普及と</a:t>
+              <a:t>分野で世界をリードする企業で、近年深層学習の普及と</a:t>
             </a:r>
             <a:r>
               <a:rPr kumimoji="1" lang="en-US" altLang="ja-JP" dirty="0"/>
@@ -1225,7 +1225,7 @@
             </a:r>
             <a:r>
               <a:rPr kumimoji="1" lang="ja-JP" altLang="en-US" dirty="0"/>
-              <a:t>のの</a:t>
+              <a:t>について大きな潮流の中で、チップ開発、</a:t>
             </a:r>
             <a:r>
               <a:rPr kumimoji="1" lang="en-US" altLang="ja-JP" dirty="0"/>
@@ -1233,7 +1233,7 @@
             </a:r>
             <a:r>
               <a:rPr kumimoji="1" lang="ja-JP" altLang="en-US" dirty="0"/>
-              <a:t>についての大きな潮流のタイミングを的確に捉えることができた、市場トレンドを見極めることが強いと思われています。</a:t>
+              <a:t>のインフラ構築はよくできている。圧倒的なシェアを持っている。開発のタイミングを的確に捉えることができた、市場トレンドを見極めることが強いと思われています。</a:t>
             </a:r>
             <a:endParaRPr kumimoji="1" lang="en-US" altLang="ja-JP" dirty="0"/>
           </a:p>
@@ -1252,65 +1252,6 @@
             </a:r>
           </a:p>
           <a:p>
-            <a:br>
-              <a:rPr kumimoji="1" lang="en-US" altLang="ja-JP" dirty="0"/>
-            </a:br>
-            <a:r>
-              <a:rPr kumimoji="1" lang="ja-JP" altLang="en-US" dirty="0"/>
-              <a:t>今注目されている生成</a:t>
-            </a:r>
-            <a:r>
-              <a:rPr kumimoji="1" lang="en-US" altLang="ja-JP" dirty="0"/>
-              <a:t>AI</a:t>
-            </a:r>
-            <a:r>
-              <a:rPr kumimoji="1" lang="ja-JP" altLang="en-US" dirty="0"/>
-              <a:t>、</a:t>
-            </a:r>
-            <a:r>
-              <a:rPr kumimoji="1" lang="en-US" altLang="ja-JP" dirty="0"/>
-              <a:t>LLM</a:t>
-            </a:r>
-            <a:r>
-              <a:rPr kumimoji="1" lang="ja-JP" altLang="en-US" dirty="0"/>
-              <a:t>は言語モデル、言葉を操るモデル、これからは、</a:t>
-            </a:r>
-            <a:r>
-              <a:rPr kumimoji="1" lang="ja-JP" altLang="en-US" sz="1200" b="1" i="0" kern="1200" dirty="0">
-                <a:solidFill>
-                  <a:schemeClr val="tx1"/>
-                </a:solidFill>
-                <a:effectLst/>
-                <a:latin typeface="+mn-lt"/>
-                <a:ea typeface="+mn-ea"/>
-                <a:cs typeface="+mn-cs"/>
-              </a:rPr>
-              <a:t>物理世界で「見て、考えて、動く」</a:t>
-            </a:r>
-            <a:r>
-              <a:rPr kumimoji="1" lang="en-US" altLang="ja-JP" sz="1200" b="1" i="0" kern="1200" dirty="0">
-                <a:solidFill>
-                  <a:schemeClr val="tx1"/>
-                </a:solidFill>
-                <a:effectLst/>
-                <a:latin typeface="+mn-lt"/>
-                <a:ea typeface="+mn-ea"/>
-                <a:cs typeface="+mn-cs"/>
-              </a:rPr>
-              <a:t>AI</a:t>
-            </a:r>
-            <a:r>
-              <a:rPr kumimoji="1" lang="ja-JP" altLang="en-US" sz="1200" b="1" i="0" kern="1200" dirty="0">
-                <a:solidFill>
-                  <a:schemeClr val="tx1"/>
-                </a:solidFill>
-                <a:effectLst/>
-                <a:latin typeface="+mn-lt"/>
-                <a:ea typeface="+mn-ea"/>
-                <a:cs typeface="+mn-cs"/>
-              </a:rPr>
-              <a:t>が進んで、実用化されているということです。</a:t>
-            </a:r>
             <a:endParaRPr kumimoji="1" lang="en-US" altLang="ja-JP" dirty="0"/>
           </a:p>
         </p:txBody>
@@ -1401,6 +1342,23 @@
           <a:bodyPr/>
           <a:lstStyle/>
           <a:p>
+            <a:pPr marL="0" marR="0" lvl="0" indent="0" algn="l" defTabSz="914400" rtl="0" eaLnBrk="1" fontAlgn="auto" latinLnBrk="0" hangingPunct="1">
+              <a:lnSpc>
+                <a:spcPct val="100000"/>
+              </a:lnSpc>
+              <a:spcBef>
+                <a:spcPts val="0"/>
+              </a:spcBef>
+              <a:spcAft>
+                <a:spcPts val="0"/>
+              </a:spcAft>
+              <a:buClrTx/>
+              <a:buSzTx/>
+              <a:buFontTx/>
+              <a:buNone/>
+              <a:tabLst/>
+              <a:defRPr/>
+            </a:pPr>
             <a:r>
               <a:rPr kumimoji="1" lang="ja-JP" altLang="en-US" dirty="0"/>
               <a:t>概要は以下四つに分けて話します。まず物理</a:t>
@@ -1411,7 +1369,19 @@
             </a:r>
             <a:r>
               <a:rPr kumimoji="1" lang="ja-JP" altLang="en-US" dirty="0"/>
-              <a:t>の定義、なぜ注目されているか、それから使っている技術を簡単に説明して、最後リガクで活用できるところの想定という順で話します。</a:t>
+              <a:t>の定義、次はなぜ注目されているか、それから基本的な仕組みを説明して、最後</a:t>
+            </a:r>
+            <a:r>
+              <a:rPr lang="ja-JP" altLang="en-US" sz="1200" dirty="0">
+                <a:solidFill>
+                  <a:schemeClr val="tx1"/>
+                </a:solidFill>
+              </a:rPr>
+              <a:t>リガクと関係しそうな事例</a:t>
+            </a:r>
+            <a:r>
+              <a:rPr kumimoji="1" lang="ja-JP" altLang="en-US" dirty="0"/>
+              <a:t>という順で話します。</a:t>
             </a:r>
             <a:br>
               <a:rPr kumimoji="1" lang="en-US" altLang="ja-JP" dirty="0"/>
@@ -1592,6 +1562,71 @@
               <a:rPr lang="ja-JP" altLang="en-US" dirty="0"/>
               <a:t>を学習するものです。</a:t>
             </a:r>
+            <a:endParaRPr lang="en-US" altLang="ja-JP" dirty="0"/>
+          </a:p>
+          <a:p>
+            <a:pPr marL="0" marR="0" lvl="0" indent="0" algn="l" defTabSz="914400" rtl="0" eaLnBrk="1" fontAlgn="auto" latinLnBrk="0" hangingPunct="1">
+              <a:lnSpc>
+                <a:spcPct val="100000"/>
+              </a:lnSpc>
+              <a:spcBef>
+                <a:spcPts val="0"/>
+              </a:spcBef>
+              <a:spcAft>
+                <a:spcPts val="0"/>
+              </a:spcAft>
+              <a:buClrTx/>
+              <a:buSzTx/>
+              <a:buFontTx/>
+              <a:buNone/>
+              <a:tabLst/>
+              <a:defRPr/>
+            </a:pPr>
+            <a:r>
+              <a:rPr lang="ja-JP" altLang="en-US" dirty="0"/>
+              <a:t>簡単にいうと、</a:t>
+            </a:r>
+            <a:r>
+              <a:rPr lang="en-US" altLang="ja-JP" dirty="0" err="1"/>
+              <a:t>llm</a:t>
+            </a:r>
+            <a:r>
+              <a:rPr lang="ja-JP" altLang="en-US" dirty="0"/>
+              <a:t>が人間の言葉だけ操るもんで、物理</a:t>
+            </a:r>
+            <a:r>
+              <a:rPr lang="en-US" altLang="ja-JP" dirty="0"/>
+              <a:t>ai</a:t>
+            </a:r>
+            <a:r>
+              <a:rPr lang="ja-JP" altLang="en-US" dirty="0"/>
+              <a:t>であれば、</a:t>
+            </a:r>
+            <a:r>
+              <a:rPr lang="ja-JP" altLang="en-US" dirty="0">
+                <a:solidFill>
+                  <a:schemeClr val="tx1"/>
+                </a:solidFill>
+              </a:rPr>
+              <a:t>物理世界で「見て、考えて、動く」ことができるようになる、物理</a:t>
+            </a:r>
+            <a:r>
+              <a:rPr lang="en-US" altLang="ja-JP" dirty="0">
+                <a:solidFill>
+                  <a:schemeClr val="tx1"/>
+                </a:solidFill>
+              </a:rPr>
+              <a:t>ai</a:t>
+            </a:r>
+            <a:r>
+              <a:rPr lang="ja-JP" altLang="en-US" dirty="0">
+                <a:solidFill>
+                  <a:schemeClr val="tx1"/>
+                </a:solidFill>
+              </a:rPr>
+              <a:t>はそういうものです。</a:t>
+            </a:r>
+            <a:endParaRPr lang="ja-JP" altLang="en-US" dirty="0"/>
           </a:p>
           <a:p>
             <a:endParaRPr kumimoji="1" lang="ja-JP" altLang="en-US" dirty="0"/>
@@ -1707,7 +1742,7 @@
           <a:p>
             <a:r>
               <a:rPr kumimoji="1" lang="ja-JP" altLang="en-US" dirty="0"/>
-              <a:t>マニピュレーターは、何かを掴む時には、そのものの形状大きさによって、どれくらいの力を使うか、ものを掴んでから　またものの状態、重心などによって、安定にキャッチできるために、さらに細かく調整するとか。物理</a:t>
+              <a:t>マニピュレーターは、何かを掴む時には、そのものの形状大きさによって、どれくらいの力を使うか、ものを掴んでから　またものの状態、例えば持っている間の重心などによって、安定にキャッチできるために、さらに細かく調整するとか。物理</a:t>
             </a:r>
             <a:r>
               <a:rPr kumimoji="1" lang="en-US" altLang="ja-JP" dirty="0"/>
@@ -1802,7 +1837,7 @@
           <a:p>
             <a:r>
               <a:rPr kumimoji="1" lang="ja-JP" altLang="en-US" dirty="0"/>
-              <a:t>ロボットはやったら人間が楽になるということが一つ</a:t>
+              <a:t>なぜ注目される、ここ二つに分けて、一つは工場など現場の課題、人手不足、危険な作業は、ロボットはやったら人間が楽になるということ、二つ目は</a:t>
             </a:r>
             <a:endParaRPr kumimoji="1" lang="en-US" altLang="ja-JP" dirty="0"/>
           </a:p>
@@ -1933,7 +1968,18 @@
             </a:pPr>
             <a:r>
               <a:rPr lang="ja-JP" altLang="en-US" dirty="0"/>
-              <a:t>基本的な仕組みを説明します。プロセスとしては、認知、判断、行動繰り返しになります。</a:t>
+              <a:t>基本的な仕組みを説明しま</a:t>
+            </a:r>
+            <a:r>
+              <a:rPr lang="ja-JP" altLang="en-US"/>
+              <a:t>す。</a:t>
+            </a:r>
+            <a:br>
+              <a:rPr lang="en-US" altLang="ja-JP" dirty="0"/>
+            </a:br>
+            <a:r>
+              <a:rPr lang="ja-JP" altLang="en-US" dirty="0"/>
+              <a:t>プロセスとしては、認知、判断、行動繰り返しになります。</a:t>
             </a:r>
             <a:endParaRPr lang="en-US" altLang="ja-JP" dirty="0"/>
           </a:p>
@@ -3486,7 +3532,7 @@
                 <a:tabLst/>
                 <a:defRPr/>
               </a:pPr>
-              <a:t>3/10/2026</a:t>
+              <a:t>3/12/2026</a:t>
             </a:fld>
             <a:endParaRPr kumimoji="0" lang="en-US" sz="600" b="0" i="0" u="none" strike="noStrike" kern="1200" cap="none" spc="0" normalizeH="0" baseline="0" noProof="0">
               <a:ln>
@@ -3940,7 +3986,7 @@
                 <a:tabLst/>
                 <a:defRPr/>
               </a:pPr>
-              <a:t>3/10/2026</a:t>
+              <a:t>3/12/2026</a:t>
             </a:fld>
             <a:endParaRPr kumimoji="0" lang="en-US" sz="600" b="0" i="0" u="none" strike="noStrike" kern="1200" cap="none" spc="0" normalizeH="0" baseline="0" noProof="0">
               <a:ln>
@@ -4420,7 +4466,7 @@
                 <a:tabLst/>
                 <a:defRPr/>
               </a:pPr>
-              <a:t>3/10/2026</a:t>
+              <a:t>3/12/2026</a:t>
             </a:fld>
             <a:endParaRPr kumimoji="0" lang="en-US" sz="600" b="0" i="0" u="none" strike="noStrike" kern="1200" cap="none" spc="0" normalizeH="0" baseline="0" noProof="0">
               <a:ln>
@@ -5273,7 +5319,7 @@
                 <a:tabLst/>
                 <a:defRPr/>
               </a:pPr>
-              <a:t>3/10/2026</a:t>
+              <a:t>3/12/2026</a:t>
             </a:fld>
             <a:endParaRPr kumimoji="0" lang="en-US" sz="600" b="0" i="0" u="none" strike="noStrike" kern="1200" cap="none" spc="0" normalizeH="0" baseline="0" noProof="0">
               <a:ln>
@@ -5884,7 +5930,7 @@
                 <a:tabLst/>
                 <a:defRPr/>
               </a:pPr>
-              <a:t>3/10/2026</a:t>
+              <a:t>3/12/2026</a:t>
             </a:fld>
             <a:endParaRPr kumimoji="0" lang="en-US" sz="600" b="0" i="0" u="none" strike="noStrike" kern="1200" cap="none" spc="0" normalizeH="0" baseline="0" noProof="0">
               <a:ln>
@@ -6304,7 +6350,7 @@
                 <a:tabLst/>
                 <a:defRPr/>
               </a:pPr>
-              <a:t>3/10/2026</a:t>
+              <a:t>3/12/2026</a:t>
             </a:fld>
             <a:endParaRPr kumimoji="0" lang="en-US" sz="600" b="0" i="0" u="none" strike="noStrike" kern="1200" cap="none" spc="0" normalizeH="0" baseline="0" noProof="0">
               <a:ln>
@@ -7248,7 +7294,7 @@
                 <a:tabLst/>
                 <a:defRPr/>
               </a:pPr>
-              <a:t>3/10/2026</a:t>
+              <a:t>3/12/2026</a:t>
             </a:fld>
             <a:endParaRPr kumimoji="0" lang="en-US" sz="600" b="0" i="0" u="none" strike="noStrike" kern="1200" cap="none" spc="0" normalizeH="0" baseline="0" noProof="0">
               <a:ln>
@@ -7639,7 +7685,7 @@
                 <a:tabLst/>
                 <a:defRPr/>
               </a:pPr>
-              <a:t>3/10/2026</a:t>
+              <a:t>3/12/2026</a:t>
             </a:fld>
             <a:endParaRPr kumimoji="0" lang="en-US" sz="600" b="0" i="0" u="none" strike="noStrike" kern="1200" cap="none" spc="0" normalizeH="0" baseline="0" noProof="0">
               <a:ln>
@@ -8294,7 +8340,7 @@
                 <a:tabLst/>
                 <a:defRPr/>
               </a:pPr>
-              <a:t>3/10/2026</a:t>
+              <a:t>3/12/2026</a:t>
             </a:fld>
             <a:endParaRPr kumimoji="0" lang="en-US" sz="600" b="0" i="0" u="none" strike="noStrike" kern="1200" cap="none" spc="0" normalizeH="0" baseline="0" noProof="0">
               <a:ln>
@@ -8762,7 +8808,7 @@
                 <a:tabLst/>
                 <a:defRPr/>
               </a:pPr>
-              <a:t>3/10/2026</a:t>
+              <a:t>3/12/2026</a:t>
             </a:fld>
             <a:endParaRPr kumimoji="0" lang="en-US" sz="600" b="0" i="0" u="none" strike="noStrike" kern="1200" cap="none" spc="0" normalizeH="0" baseline="0" noProof="0">
               <a:ln>
@@ -9395,7 +9441,7 @@
                 <a:tabLst/>
                 <a:defRPr/>
               </a:pPr>
-              <a:t>3/10/2026</a:t>
+              <a:t>3/12/2026</a:t>
             </a:fld>
             <a:endParaRPr kumimoji="0" lang="en-US" sz="600" b="0" i="0" u="none" strike="noStrike" kern="1200" cap="none" spc="0" normalizeH="0" baseline="0" noProof="0">
               <a:ln>
@@ -9750,7 +9796,7 @@
                 <a:tabLst/>
                 <a:defRPr/>
               </a:pPr>
-              <a:t>3/10/2026</a:t>
+              <a:t>3/12/2026</a:t>
             </a:fld>
             <a:endParaRPr kumimoji="0" lang="en-US" sz="600" b="0" i="0" u="none" strike="noStrike" kern="1200" cap="none" spc="0" normalizeH="0" baseline="0" noProof="0">
               <a:ln>
@@ -10034,7 +10080,7 @@
                 <a:tabLst/>
                 <a:defRPr/>
               </a:pPr>
-              <a:t>3/10/2026</a:t>
+              <a:t>3/12/2026</a:t>
             </a:fld>
             <a:endParaRPr kumimoji="0" lang="en-US" sz="600" b="0" i="0" u="none" strike="noStrike" kern="1200" cap="none" spc="0" normalizeH="0" baseline="0" noProof="0">
               <a:ln>
@@ -10629,7 +10675,7 @@
                 <a:tabLst/>
                 <a:defRPr/>
               </a:pPr>
-              <a:t>3/10/2026</a:t>
+              <a:t>3/12/2026</a:t>
             </a:fld>
             <a:endParaRPr kumimoji="0" lang="en-US" sz="600" b="0" i="0" u="none" strike="noStrike" kern="1200" cap="none" spc="0" normalizeH="0" baseline="0" noProof="0">
               <a:ln>
@@ -11678,7 +11724,7 @@
                 <a:tabLst/>
                 <a:defRPr/>
               </a:pPr>
-              <a:t>3/10/2026</a:t>
+              <a:t>3/12/2026</a:t>
             </a:fld>
             <a:endParaRPr kumimoji="0" lang="en-US" sz="600" b="0" i="0" u="none" strike="noStrike" kern="1200" cap="none" spc="0" normalizeH="0" baseline="0" noProof="0">
               <a:ln>
@@ -12277,7 +12323,7 @@
                 <a:tabLst/>
                 <a:defRPr/>
               </a:pPr>
-              <a:t>3/10/2026</a:t>
+              <a:t>3/12/2026</a:t>
             </a:fld>
             <a:endParaRPr kumimoji="0" lang="en-US" sz="600" b="0" i="0" u="none" strike="noStrike" kern="1200" cap="none" spc="0" normalizeH="0" baseline="0" noProof="0">
               <a:ln>
@@ -12863,7 +12909,7 @@
                 <a:tabLst/>
                 <a:defRPr/>
               </a:pPr>
-              <a:t>3/10/2026</a:t>
+              <a:t>3/12/2026</a:t>
             </a:fld>
             <a:endParaRPr kumimoji="0" lang="en-US" sz="600" b="0" i="0" u="none" strike="noStrike" kern="1200" cap="none" spc="0" normalizeH="0" baseline="0" noProof="0">
               <a:ln>
@@ -13408,7 +13454,7 @@
                 <a:tabLst/>
                 <a:defRPr/>
               </a:pPr>
-              <a:t>3/10/2026</a:t>
+              <a:t>3/12/2026</a:t>
             </a:fld>
             <a:endParaRPr kumimoji="0" lang="en-US" sz="600" b="0" i="0" u="none" strike="noStrike" kern="1200" cap="none" spc="0" normalizeH="0" baseline="0" noProof="0">
               <a:ln>
@@ -13694,7 +13740,7 @@
           <a:p>
             <a:fld id="{2396ED77-EC0D-4D91-BAFE-F649CEFC215E}" type="datetimeFigureOut">
               <a:rPr kumimoji="1" lang="ja-JP" altLang="en-US" smtClean="0"/>
-              <a:t>2026/3/10</a:t>
+              <a:t>2026/3/12</a:t>
             </a:fld>
             <a:endParaRPr kumimoji="1" lang="ja-JP" altLang="en-US"/>
           </a:p>
@@ -13894,7 +13940,7 @@
           <a:p>
             <a:fld id="{2396ED77-EC0D-4D91-BAFE-F649CEFC215E}" type="datetimeFigureOut">
               <a:rPr kumimoji="1" lang="ja-JP" altLang="en-US" smtClean="0"/>
-              <a:t>2026/3/10</a:t>
+              <a:t>2026/3/12</a:t>
             </a:fld>
             <a:endParaRPr kumimoji="1" lang="ja-JP" altLang="en-US"/>
           </a:p>
@@ -14139,7 +14185,7 @@
           <a:p>
             <a:fld id="{2396ED77-EC0D-4D91-BAFE-F649CEFC215E}" type="datetimeFigureOut">
               <a:rPr kumimoji="1" lang="ja-JP" altLang="en-US" smtClean="0"/>
-              <a:t>2026/3/10</a:t>
+              <a:t>2026/3/12</a:t>
             </a:fld>
             <a:endParaRPr kumimoji="1" lang="ja-JP" altLang="en-US"/>
           </a:p>
@@ -14602,7 +14648,7 @@
                 <a:tabLst/>
                 <a:defRPr/>
               </a:pPr>
-              <a:t>3/10/2026</a:t>
+              <a:t>3/12/2026</a:t>
             </a:fld>
             <a:endParaRPr kumimoji="0" lang="en-US" sz="600" b="0" i="0" u="none" strike="noStrike" kern="1200" cap="none" spc="0" normalizeH="0" baseline="0" noProof="0">
               <a:ln>
@@ -15118,7 +15164,7 @@
           <a:p>
             <a:fld id="{2396ED77-EC0D-4D91-BAFE-F649CEFC215E}" type="datetimeFigureOut">
               <a:rPr kumimoji="1" lang="ja-JP" altLang="en-US" smtClean="0"/>
-              <a:t>2026/3/10</a:t>
+              <a:t>2026/3/12</a:t>
             </a:fld>
             <a:endParaRPr kumimoji="1" lang="ja-JP" altLang="en-US"/>
           </a:p>
@@ -15546,7 +15592,7 @@
           <a:p>
             <a:fld id="{2396ED77-EC0D-4D91-BAFE-F649CEFC215E}" type="datetimeFigureOut">
               <a:rPr kumimoji="1" lang="ja-JP" altLang="en-US" smtClean="0"/>
-              <a:t>2026/3/10</a:t>
+              <a:t>2026/3/12</a:t>
             </a:fld>
             <a:endParaRPr kumimoji="1" lang="ja-JP" altLang="en-US"/>
           </a:p>
@@ -15663,7 +15709,7 @@
           <a:p>
             <a:fld id="{2396ED77-EC0D-4D91-BAFE-F649CEFC215E}" type="datetimeFigureOut">
               <a:rPr kumimoji="1" lang="ja-JP" altLang="en-US" smtClean="0"/>
-              <a:t>2026/3/10</a:t>
+              <a:t>2026/3/12</a:t>
             </a:fld>
             <a:endParaRPr kumimoji="1" lang="ja-JP" altLang="en-US"/>
           </a:p>
@@ -15758,7 +15804,7 @@
           <a:p>
             <a:fld id="{2396ED77-EC0D-4D91-BAFE-F649CEFC215E}" type="datetimeFigureOut">
               <a:rPr kumimoji="1" lang="ja-JP" altLang="en-US" smtClean="0"/>
-              <a:t>2026/3/10</a:t>
+              <a:t>2026/3/12</a:t>
             </a:fld>
             <a:endParaRPr kumimoji="1" lang="ja-JP" altLang="en-US"/>
           </a:p>
@@ -16065,7 +16111,7 @@
           <a:p>
             <a:fld id="{2396ED77-EC0D-4D91-BAFE-F649CEFC215E}" type="datetimeFigureOut">
               <a:rPr kumimoji="1" lang="ja-JP" altLang="en-US" smtClean="0"/>
-              <a:t>2026/3/10</a:t>
+              <a:t>2026/3/12</a:t>
             </a:fld>
             <a:endParaRPr kumimoji="1" lang="ja-JP" altLang="en-US"/>
           </a:p>
@@ -16317,7 +16363,7 @@
           <a:p>
             <a:fld id="{2396ED77-EC0D-4D91-BAFE-F649CEFC215E}" type="datetimeFigureOut">
               <a:rPr kumimoji="1" lang="ja-JP" altLang="en-US" smtClean="0"/>
-              <a:t>2026/3/10</a:t>
+              <a:t>2026/3/12</a:t>
             </a:fld>
             <a:endParaRPr kumimoji="1" lang="ja-JP" altLang="en-US"/>
           </a:p>
@@ -16517,7 +16563,7 @@
           <a:p>
             <a:fld id="{2396ED77-EC0D-4D91-BAFE-F649CEFC215E}" type="datetimeFigureOut">
               <a:rPr kumimoji="1" lang="ja-JP" altLang="en-US" smtClean="0"/>
-              <a:t>2026/3/10</a:t>
+              <a:t>2026/3/12</a:t>
             </a:fld>
             <a:endParaRPr kumimoji="1" lang="ja-JP" altLang="en-US"/>
           </a:p>
@@ -16727,7 +16773,7 @@
           <a:p>
             <a:fld id="{2396ED77-EC0D-4D91-BAFE-F649CEFC215E}" type="datetimeFigureOut">
               <a:rPr kumimoji="1" lang="ja-JP" altLang="en-US" smtClean="0"/>
-              <a:t>2026/3/10</a:t>
+              <a:t>2026/3/12</a:t>
             </a:fld>
             <a:endParaRPr kumimoji="1" lang="ja-JP" altLang="en-US"/>
           </a:p>
@@ -17082,7 +17128,7 @@
                 <a:tabLst/>
                 <a:defRPr/>
               </a:pPr>
-              <a:t>3/10/2026</a:t>
+              <a:t>3/12/2026</a:t>
             </a:fld>
             <a:endParaRPr kumimoji="0" lang="en-US" sz="600" b="0" i="0" u="none" strike="noStrike" kern="1200" cap="none" spc="0" normalizeH="0" baseline="0" noProof="0">
               <a:ln>
@@ -17590,7 +17636,7 @@
                 <a:tabLst/>
                 <a:defRPr/>
               </a:pPr>
-              <a:t>3/10/2026</a:t>
+              <a:t>3/12/2026</a:t>
             </a:fld>
             <a:endParaRPr kumimoji="0" lang="en-US" sz="600" b="0" i="0" u="none" strike="noStrike" kern="1200" cap="none" spc="0" normalizeH="0" baseline="0" noProof="0">
               <a:ln>
@@ -18295,7 +18341,7 @@
                 <a:tabLst/>
                 <a:defRPr/>
               </a:pPr>
-              <a:t>3/10/2026</a:t>
+              <a:t>3/12/2026</a:t>
             </a:fld>
             <a:endParaRPr kumimoji="0" lang="en-US" sz="600" b="0" i="0" u="none" strike="noStrike" kern="1200" cap="none" spc="0" normalizeH="0" baseline="0" noProof="0">
               <a:ln>
@@ -18663,7 +18709,7 @@
                 <a:tabLst/>
                 <a:defRPr/>
               </a:pPr>
-              <a:t>3/10/2026</a:t>
+              <a:t>3/12/2026</a:t>
             </a:fld>
             <a:endParaRPr kumimoji="0" lang="en-US" sz="600" b="0" i="0" u="none" strike="noStrike" kern="1200" cap="none" spc="0" normalizeH="0" baseline="0" noProof="0">
               <a:ln>
@@ -19122,7 +19168,7 @@
                 <a:tabLst/>
                 <a:defRPr/>
               </a:pPr>
-              <a:t>3/10/2026</a:t>
+              <a:t>3/12/2026</a:t>
             </a:fld>
             <a:endParaRPr kumimoji="0" lang="en-US" sz="600" b="0" i="0" u="none" strike="noStrike" kern="1200" cap="none" spc="0" normalizeH="0" baseline="0" noProof="0">
               <a:ln>
@@ -19711,7 +19757,7 @@
                 <a:tabLst/>
                 <a:defRPr/>
               </a:pPr>
-              <a:t>3/10/2026</a:t>
+              <a:t>3/12/2026</a:t>
             </a:fld>
             <a:endParaRPr kumimoji="0" lang="en-US" sz="600" b="0" i="0" u="none" strike="noStrike" kern="1200" cap="none" spc="0" normalizeH="0" baseline="0" noProof="0">
               <a:ln>
@@ -20183,7 +20229,7 @@
                 <a:tabLst/>
                 <a:defRPr/>
               </a:pPr>
-              <a:t>3/10/2026</a:t>
+              <a:t>3/12/2026</a:t>
             </a:fld>
             <a:endParaRPr kumimoji="0" lang="en-US" sz="600" b="0" i="0" u="none" strike="noStrike" kern="1200" cap="none" spc="0" normalizeH="0" baseline="0" noProof="0">
               <a:ln>
@@ -21475,7 +21521,7 @@
           <a:p>
             <a:fld id="{2396ED77-EC0D-4D91-BAFE-F649CEFC215E}" type="datetimeFigureOut">
               <a:rPr kumimoji="1" lang="ja-JP" altLang="en-US" smtClean="0"/>
-              <a:t>2026/3/10</a:t>
+              <a:t>2026/3/12</a:t>
             </a:fld>
             <a:endParaRPr kumimoji="1" lang="ja-JP" altLang="en-US"/>
           </a:p>
